--- a/ЗАЩИТА/ПД ТП МОСС 2026.pptx
+++ b/ЗАЩИТА/ПД ТП МОСС 2026.pptx
@@ -946,7 +946,7 @@
           </a:prstGeom>
           <a:extLst>
             <a:ext uri="{C572A759-6A51-4108-AA02-DFA0A04FC94B}">
-              <ma14:wrappingTextBoxFlag xmlns:ma14="http://schemas.microsoft.com/office/mac/drawingml/2011/main" xmlns="" val="0"/>
+              <ma14:wrappingTextBoxFlag xmlns="" xmlns:ma14="http://schemas.microsoft.com/office/mac/drawingml/2011/main" val="0"/>
             </a:ext>
           </a:extLst>
         </p:spPr>
@@ -1037,7 +1037,7 @@
           </a:prstGeom>
           <a:extLst>
             <a:ext uri="{C572A759-6A51-4108-AA02-DFA0A04FC94B}">
-              <ma14:wrappingTextBoxFlag xmlns:ma14="http://schemas.microsoft.com/office/mac/drawingml/2011/main" xmlns="" val="0"/>
+              <ma14:wrappingTextBoxFlag xmlns="" xmlns:ma14="http://schemas.microsoft.com/office/mac/drawingml/2011/main" val="0"/>
             </a:ext>
           </a:extLst>
         </p:spPr>
@@ -1386,14 +1386,9 @@
                   <a:srgbClr val="FFFFFF"/>
                 </a:solidFill>
                 <a:latin typeface="Montserrat SemiBold" pitchFamily="2" charset="0"/>
-                <a:ea typeface="Montserrat Medium" pitchFamily="34" charset="-122"/>
-                <a:cs typeface="Montserrat Medium" pitchFamily="34" charset="-120"/>
-              </a:rPr>
-              <a:t>Модель оценки стоимости специалиста</a:t>
-            </a:r>
-            <a:endParaRPr lang="en-US" sz="6000" b="1" dirty="0">
-              <a:latin typeface="Montserrat SemiBold" pitchFamily="2" charset="0"/>
-            </a:endParaRPr>
+              </a:rPr>
+              <a:t>Цифровая платформа экономики труда</a:t>
+            </a:r>
           </a:p>
         </p:txBody>
       </p:sp>
@@ -1630,10 +1625,10 @@
           <p:nvPr/>
         </p:nvPicPr>
         <p:blipFill>
-          <a:blip r:embed="rId4">
+          <a:blip>
             <a:extLst>
               <a:ext uri="{96DAC541-7B7A-43D3-8B79-37D633B846F1}">
-                <asvg:svgBlip xmlns:asvg="http://schemas.microsoft.com/office/drawing/2016/SVG/main" r:embed="rId5"/>
+                <asvg:svgBlip xmlns:asvg="http://schemas.microsoft.com/office/drawing/2016/SVG/main" r:embed="rId4"/>
               </a:ext>
             </a:extLst>
           </a:blip>
@@ -1946,10 +1941,10 @@
           <p:nvPr/>
         </p:nvPicPr>
         <p:blipFill>
-          <a:blip r:embed="rId4">
+          <a:blip>
             <a:extLst>
               <a:ext uri="{96DAC541-7B7A-43D3-8B79-37D633B846F1}">
-                <asvg:svgBlip xmlns:asvg="http://schemas.microsoft.com/office/drawing/2016/SVG/main" r:embed="rId5"/>
+                <asvg:svgBlip xmlns:asvg="http://schemas.microsoft.com/office/drawing/2016/SVG/main" r:embed="rId4"/>
               </a:ext>
             </a:extLst>
           </a:blip>
@@ -2729,10 +2724,10 @@
           <p:nvPr/>
         </p:nvPicPr>
         <p:blipFill>
-          <a:blip r:embed="rId4">
+          <a:blip>
             <a:extLst>
               <a:ext uri="{96DAC541-7B7A-43D3-8B79-37D633B846F1}">
-                <asvg:svgBlip xmlns:asvg="http://schemas.microsoft.com/office/drawing/2016/SVG/main" r:embed="rId5"/>
+                <asvg:svgBlip xmlns:asvg="http://schemas.microsoft.com/office/drawing/2016/SVG/main" r:embed="rId4"/>
               </a:ext>
             </a:extLst>
           </a:blip>
@@ -3025,10 +3020,10 @@
           <p:nvPr/>
         </p:nvPicPr>
         <p:blipFill>
-          <a:blip r:embed="rId4">
+          <a:blip>
             <a:extLst>
               <a:ext uri="{96DAC541-7B7A-43D3-8B79-37D633B846F1}">
-                <asvg:svgBlip xmlns:asvg="http://schemas.microsoft.com/office/drawing/2016/SVG/main" r:embed="rId5"/>
+                <asvg:svgBlip xmlns:asvg="http://schemas.microsoft.com/office/drawing/2016/SVG/main" r:embed="rId4"/>
               </a:ext>
             </a:extLst>
           </a:blip>
@@ -3932,10 +3927,10 @@
           <p:nvPr/>
         </p:nvPicPr>
         <p:blipFill>
-          <a:blip r:embed="rId4">
+          <a:blip>
             <a:extLst>
               <a:ext uri="{96DAC541-7B7A-43D3-8B79-37D633B846F1}">
-                <asvg:svgBlip xmlns:asvg="http://schemas.microsoft.com/office/drawing/2016/SVG/main" r:embed="rId5"/>
+                <asvg:svgBlip xmlns:asvg="http://schemas.microsoft.com/office/drawing/2016/SVG/main" r:embed="rId4"/>
               </a:ext>
             </a:extLst>
           </a:blip>
@@ -4725,10 +4720,10 @@
           <p:nvPr/>
         </p:nvPicPr>
         <p:blipFill>
-          <a:blip r:embed="rId4">
+          <a:blip>
             <a:extLst>
               <a:ext uri="{96DAC541-7B7A-43D3-8B79-37D633B846F1}">
-                <asvg:svgBlip xmlns:asvg="http://schemas.microsoft.com/office/drawing/2016/SVG/main" r:embed="rId5"/>
+                <asvg:svgBlip xmlns:asvg="http://schemas.microsoft.com/office/drawing/2016/SVG/main" r:embed="rId4"/>
               </a:ext>
             </a:extLst>
           </a:blip>
@@ -5097,10 +5092,10 @@
           <p:nvPr/>
         </p:nvPicPr>
         <p:blipFill>
-          <a:blip r:embed="rId4">
+          <a:blip>
             <a:extLst>
               <a:ext uri="{96DAC541-7B7A-43D3-8B79-37D633B846F1}">
-                <asvg:svgBlip xmlns:asvg="http://schemas.microsoft.com/office/drawing/2016/SVG/main" r:embed="rId5"/>
+                <asvg:svgBlip xmlns:asvg="http://schemas.microsoft.com/office/drawing/2016/SVG/main" r:embed="rId4"/>
               </a:ext>
             </a:extLst>
           </a:blip>
